--- a/Budaya-dan-Iklim-Organisasi-Pendidikan.pptx
+++ b/Budaya-dan-Iklim-Organisasi-Pendidikan.pptx
@@ -606,7 +606,9 @@
           <a:p>
             <a:r>
               <a:rPr lang="en-US" dirty="0"/>
-              <a:t/>
+              <a:t>Keterbukaan: Diukur dengan kuesioner OCDQ yang menilai perilaku kepala sekolah dan guru. Iklim terbuka ditandai kerja sama dan saling hormat. Di Indonesia dimensinya dirumuskan sebagai keterbukaan komunikasi, kehangatan hubungan, dukungan pimpinan, dan kejelasan struktur kerja. Sumber: (Hoy &amp; Miskel, 2008); (Setiyani dkk., 2024)
+Kesehatan: Menilai kemampuan sekolah menghadapi tekanan luar sambil mengarahkan sumber daya pada tujuan, lewat tujuh dimensi di tiga level. Sumber: (Hoy &amp; Miskel, 2008)
+Kewargaan: Menilai perilaku guru yang melampaui tugas resmi, seperti membantu rekan baru, tepat waktu, dan sukarela mengikuti kegiatan sekolah. Sumber: (Hoy &amp; Miskel, 2008)</a:t>
             </a:r>
             <a:endParaRPr lang="en-US" dirty="0"/>
           </a:p>
@@ -694,7 +696,11 @@
           <a:p>
             <a:r>
               <a:rPr lang="en-US" dirty="0"/>
-              <a:t/>
+              <a:t>Kebajikan: Percaya berarti rela membuka diri karena yakin pihak lain tidak akan merugikan. Kebajikan: yakin pihak lain peduli dan berniat baik. Sumber: (Hoy &amp; Miskel, 2008)
+Keandalan: Keandalan: yakin ucapan dan tindakan pihak lain konsisten dan bisa dipegang. Sumber: (Hoy &amp; Miskel, 2008)
+Kompetensi: Kompetensi: yakin pihak lain mampu mengerjakan perannya dengan baik. Sumber: (Hoy &amp; Miskel, 2008)
+Kejujuran: Kejujuran: yakin pihak lain berkata benar dan menepati janji. Sumber: (Hoy &amp; Miskel, 2008)
+Keterbukaan: Keterbukaan: yakin pihak lain mau berbagi informasi secara terbuka. Sumber: (Hoy &amp; Miskel, 2008)</a:t>
             </a:r>
             <a:endParaRPr lang="en-US" dirty="0"/>
           </a:p>
@@ -782,7 +788,10 @@
           <a:p>
             <a:r>
               <a:rPr lang="en-US" dirty="0"/>
-              <a:t/>
+              <a:t>Institusional: Level paling atas: sekolah punya integritas sehingga terlindung dari tekanan kepentingan luar. Sumber: (Hoy &amp; Miskel, 2008)
+Manajerial: Level kepala sekolah: pengaruh, perhatian pada guru (konsiderasi), penataan struktur, dan dukungan sumber daya. Sumber: (Hoy &amp; Miskel, 2008)
+Teknis: Level guru dan murid: semangat kerja guru (moral) dan penekanan pada prestasi akademik. Sumber: (Hoy &amp; Miskel, 2008)
+Ciri sekolah sehat: Ciri sekolah sehat: semangat kerja tinggi, visi selaras, dan minim konflik yang merusak. Sumber: (Huda, 2021)</a:t>
             </a:r>
             <a:endParaRPr lang="en-US" dirty="0"/>
           </a:p>
@@ -870,7 +879,10 @@
           <a:p>
             <a:r>
               <a:rPr lang="en-US" dirty="0"/>
-              <a:t/>
+              <a:t>Tanpa jalan pintas: Tidak ada cara cepat mengubah budaya atau iklim. Upaya jangka panjang yang menyeluruh lebih mungkin berhasil daripada tren sesaat. Sumber: (Hoy &amp; Miskel, 2008)
+Norma paling mudah: Dari tiga level budaya, norma yang paling mungkin berubah. Nilai dan asumsi tersembunyi jauh lebih sukar. Sumber: (Hoy &amp; Miskel, 2008)
+Sebab resistensi: Orang menolak karena nyaman dengan cara lama, takut pada ketidakpastian, dan belum mahir teknologi baru. Sumber: (Putri dkk., 2025)
+Pertahanan sosial: Budaya juga cara anggota mengatasi cemas, jadi mengubahnya berarti meminta orang melepas pertahanan sosialnya. Karena itu penolakan perlu dihadapi dengan empati dan dialog. Sumber: (Hoy &amp; Miskel, 2008)</a:t>
             </a:r>
             <a:endParaRPr lang="en-US" dirty="0"/>
           </a:p>
@@ -958,7 +970,9 @@
           <a:p>
             <a:r>
               <a:rPr lang="en-US" dirty="0"/>
-              <a:t/>
+              <a:t>Klinis: Lima langkah seperti dokter: mengenali organisasi, mendiagnosis, membuat prognosis, memberi resep, lalu mengevaluasi. Evaluasi berkala di madrasah mirip langkah terakhir ini. Sumber: (Hoy &amp; Miskel, 2008)
+Berpusat pada pertumbuhan: Perubahan dianggap sifat organisasi yang sehat dan guru berpotensi besar mengembangkannya. Pelatihan profesional sejalan dengan strategi ini. Sumber: (Hoy &amp; Miskel, 2008); (Tiftazani dkk., 2025)
+Ubah norma: Langkahnya: ungkap norma, rumuskan arah baru, tetapkan norma baru, cari kesenjangan, lalu tutup. Respondennya harus anonim. Pemimpin transformasional membantu lewat komunikasi partisipatif dan pelibatan staf. Sumber: (Hoy &amp; Miskel, 2008); (Tiftazani dkk., 2025)</a:t>
             </a:r>
             <a:endParaRPr lang="en-US" dirty="0"/>
           </a:p>
@@ -1046,7 +1060,10 @@
           <a:p>
             <a:r>
               <a:rPr lang="en-US" dirty="0"/>
-              <a:t/>
+              <a:t>Budaya, lalu iklim: Orientasi bersama yang dipegang warga sekolah membentuk suasana kerja yang mereka rasakan. Sumber: Makalah Bab IV.A
+Iklim, lalu trust: Suasana yang terbuka membuat guru lebih percaya pada pimpinan dan rekannya. Sumber: Makalah Bab IV.A; (Hoy &amp; Miskel, 2008)
+Trust, lalu health: Kepercayaan bersama komitmen dan komunikasi terbuka menopang kesehatan organisasi. Sumber: Makalah Bab IV.A
+Perubahan: Mengubah budaya butuh waktu lama dan menghadapi penolakan. Kepemimpinan transformasional, komunikasi partisipatif, pelatihan, dan evaluasi berkala membantu. Sumber: Makalah Bab IV.A</a:t>
             </a:r>
             <a:endParaRPr lang="en-US" dirty="0"/>
           </a:p>
@@ -1134,7 +1151,10 @@
           <a:p>
             <a:r>
               <a:rPr lang="en-US" dirty="0"/>
-              <a:t/>
+              <a:t>Nilai lewat musyawarah: Kepala madrasah menyusun nilai inti bersama guru dan staf, memberi teladan setiap hari, dan konsisten menegakkan norma. Sumber: Makalah Bab IV.C
+Survei anonim: Pengelola memetakan iklim dan kesehatan sekolah secara berkala lewat survei anonim guru, lalu membandingkannya dengan persepsi pimpinan. Sumber: Makalah Bab IV.C
+Ubah bertahap: Pimpinan mengubah secara bertahap: ungkap norma yang berlaku, beri pelatihan, buka ruang dialog bagi yang ragu, lalu evaluasi berkala. Sumber: Makalah Bab IV.C
+Riset lanjutan: Peneliti berikutnya menguji secara empiris dimensi lokal terhadap dimensi Hoy dan Miskel, termasuk integritas institusional dan kemungkinan subbudaya. Sumber: Makalah Bab IV.C</a:t>
             </a:r>
             <a:endParaRPr lang="en-US" dirty="0"/>
           </a:p>
@@ -1310,7 +1330,14 @@
           <a:p>
             <a:r>
               <a:rPr lang="en-US" dirty="0"/>
-              <a:t/>
+              <a:t>Latar Belakang: Membandingkan sekolah yang ideal menurut teori dengan kenyataan di lembaga pendidikan Islam. Sumber: Makalah Bab I.A
+Sistem Terbuka: Sekolah dipandang sebagai sistem yang menerima masukan dari lingkungan dan harus menyesuaikan diri. Sumber: Makalah Bab II.A; (Hoy &amp; Miskel, 2008)
+Budaya: Menjelaskan apa itu budaya organisasi dan tiga lapisannya: norma, nilai, dan asumsi. Sumber: Makalah Bab II.B; (Hoy &amp; Miskel, 2008)
+Nilai dan Norma: Menjelaskan bagaimana nilai sekolah dirumuskan, dijadikan aturan, dibiasakan, dan dijaga. Sumber: Makalah Bab III.B
+Iklim: Membedakan budaya, yaitu keyakinan yang mengendap, dari iklim, yaitu suasana yang dirasakan sehari-hari. Sumber: Makalah Bab II.C; (Hoy &amp; Miskel, 2008)
+Kepercayaan dan Kesehatan: Rasa saling percaya warga sekolah menopang kesehatan organisasi, yaitu kemampuan sekolah tetap berfungsi dan mencapai tujuan. Sumber: Makalah Bab II.D dan II.E; (Hoy &amp; Miskel, 2008)
+Perubahan: Menjelaskan mengapa mengubah budaya itu lama dan mengapa sebagian orang menolaknya. Sumber: Makalah Bab II.F; (Hoy &amp; Miskel, 2008)
+Penutup: Kesimpulan, implikasi, dan saran untuk kepala madrasah, pengelola, dan peneliti. Sumber: Makalah Bab IV</a:t>
             </a:r>
             <a:endParaRPr lang="en-US" dirty="0"/>
           </a:p>
@@ -1398,7 +1425,10 @@
           <a:p>
             <a:r>
               <a:rPr lang="en-US" dirty="0"/>
-              <a:t/>
+              <a:t>Ideal: Sekolah efektif bila empat unsurnya (struktur, individu, budaya, politik) bergerak searah. Makin cocok satu sama lain, makin efektif sekolahnya. Sumber: (Hoy &amp; Miskel, 2008)
+Motivasi guru rendah: Penelitian melaporkan motivasi kerja guru rendah, budaya berprestasi belum terbentuk, dan warga sekolah kurang memahami nilai serta slogan sekolahnya. Sumber: (Fandholi dkk., 2023)
+Komunikasi lemah: Komunikasi yang kurang efektif antara pimpinan dan staf membuat komitmen profesional guru melemah. Sumber: (Nurlathifah &amp; Hidayat, 2025)
+Sekadar administratif: Sekolah yang hanya mengikuti petunjuk teknis dan bekerja monoton membuat guru kurang berani berinovasi dalam pembelajaran. Sumber: (Murniati &amp; Sudana, 2023)</a:t>
             </a:r>
             <a:endParaRPr lang="en-US" dirty="0"/>
           </a:p>
@@ -1486,7 +1516,11 @@
           <a:p>
             <a:r>
               <a:rPr lang="en-US" dirty="0"/>
-              <a:t/>
+              <a:t>Level budaya: Pertanyaan 1: apa itu budaya organisasi, apa saja levelnya, dan bagaimana wujudnya di lembaga pendidikan Islam. Sumber: Makalah Bab I.B
+Nilai dan norma: Pertanyaan 2: bagaimana nilai dan norma dibentuk, ditanamkan kepada warga sekolah, dan dijaga. Sumber: Makalah Bab I.B
+Budaya vs iklim: Pertanyaan 3: apa beda budaya dan iklim, dan bagaimana membangun iklim kerja yang kondusif. Sumber: Makalah Bab I.B
+Trust dan health: Pertanyaan 4: bagaimana rasa saling percaya berhubungan dengan kesehatan organisasi. Sumber: Makalah Bab I.B
+Perubahan: Pertanyaan 5: bagaimana perubahan budaya dikelola, termasuk ketika ada yang menolaknya. Sumber: Makalah Bab I.B</a:t>
             </a:r>
             <a:endParaRPr lang="en-US" dirty="0"/>
           </a:p>
@@ -1574,7 +1608,10 @@
           <a:p>
             <a:r>
               <a:rPr lang="en-US" dirty="0"/>
-              <a:t/>
+              <a:t>Input, proses, output: Sekolah mengambil guru, murid, dan dana dari lingkungan, mengolahnya menjadi lulusan terdidik, lalu hasilnya kembali ke lingkungan. Umpan balik menjaga siklus ini. Sumber: (Hoy &amp; Miskel, 2008)
+Empat unsur: Perilaku di sekolah lahir dari interaksi struktur (aturan formal), individu, budaya (keyakinan bersama), dan politik (kekuasaan informal). Sumber: (Hoy &amp; Miskel, 2008)
+Harus adaptif: Sekolah bergantung pada lingkungannya. Agar bertahan ia perlu menyesuaikan diri, artinya perlu berubah. Sumber: (Hoy &amp; Miskel, 2008)
+Lembaga Islam: Lembaga pendidikan Islam berada di antara tuntutan modernisasi manajemen dan kewajiban menjaga nilai keislaman. Sumber: (Irhas, 2026)</a:t>
             </a:r>
             <a:endParaRPr lang="en-US" dirty="0"/>
           </a:p>
@@ -1662,7 +1699,10 @@
           <a:p>
             <a:r>
               <a:rPr lang="en-US" dirty="0"/>
-              <a:t/>
+              <a:t>Orientasi bersama: Budaya adalah cara pandang yang dipegang bersama sehingga sebuah sekolah punya identitas yang berbeda dari sekolah lain. Sumber: (Hoy &amp; Miskel, 2008)
+Kepribadian kolektif: Seperti manusia punya kepribadian, sekolah punya budaya yang menjadi dasar identitas dan cara kerjanya. Sumber: (Habudin, 2020)
+Sistem makna bersama: Warga sekolah memahami dan menjalani arti yang sama tentang apa yang penting dan pantas. Sumber: (Afrida &amp; Fitri, 2022)
+Fungsi: Budaya menegaskan batas antarorganisasi, memberi identitas, menumbuhkan komitmen, menjaga stabilitas, dan menjadi perekat yang menyediakan standar perilaku. Sumber: (Hoy &amp; Miskel, 2008)</a:t>
             </a:r>
             <a:endParaRPr lang="en-US" dirty="0"/>
           </a:p>
@@ -1750,7 +1790,9 @@
           <a:p>
             <a:r>
               <a:rPr lang="en-US" dirty="0"/>
-              <a:t/>
+              <a:t>Norma: Aturan yang umumnya tidak tertulis dan terasa langsung dalam perilaku sehari-hari. Pelanggarnya mendapat sanksi. Sumber: (Hoy &amp; Miskel, 2008)
+Nilai: Keyakinan tentang apa yang diinginkan. Nilai menjadi ukuran keberhasilan dan memberi rasa identitas. Sumber: (Hoy &amp; Miskel, 2008)
+Asumsi: Keyakinan terdalam yang dianggap biasa sehingga jarang dipertanyakan, maka paling sulit berubah. Di madrasah, contohnya pandangan bahwa bekerja adalah ibadah. Sumber: (Hoy &amp; Miskel, 2008); (Kusumaningrum dkk., 2020)</a:t>
             </a:r>
             <a:endParaRPr lang="en-US" dirty="0"/>
           </a:p>
@@ -1838,7 +1880,10 @@
           <a:p>
             <a:r>
               <a:rPr lang="en-US" dirty="0"/>
-              <a:t/>
+              <a:t>Rumuskan: Nilai seperti religiusitas, kejujuran, dan tanggung jawab disepakati bersama pimpinan, guru, dan staf. Nilai yang disusun sepihak berisiko menjadi slogan. Sumber: (Wulandari &amp; Nugroho, 2020); (Hoy &amp; Miskel, 2008)
+Terapkan: Nilai diubah menjadi aturan konkret, ada yang tertulis (kode etik, tata tertib) dan ada yang tidak tertulis (senyum, salam, sapa, sopan, santun). Sumber: (Nasution dkk., 2025)
+Tanamkan: Murid dibiasakan, misalnya salat berjamaah, membaca Al-Quran, dan piket kebersihan, sampai pengetahuan moral menjadi tindakan. Sumber: (Indrianingrum dkk., 2024)
+Jaga: Kepala sekolah memberi contoh sikap, kedisiplinan, dan ketaatan aturan agar norma tidak pudar. Sumber: (Anjarrini &amp; Rindaningsih, 2022)</a:t>
             </a:r>
             <a:endParaRPr lang="en-US" dirty="0"/>
           </a:p>
@@ -1926,7 +1971,10 @@
           <a:p>
             <a:r>
               <a:rPr lang="en-US" dirty="0"/>
-              <a:t/>
+              <a:t>Budaya: Kumpulan nilai, norma, dan asumsi yang sudah mengakar lama sehingga lambat berubah. Sumber: (Habudin, 2020); (Tasliman &amp; Suklani, 2024)
+Iklim: Perasaan dan persepsi warga sekolah tentang suasana kerja sehari-hari, sehingga lebih mudah berubah. Sumber: (Nisa dkk., 2020)
+Objek berbeda: Budaya menyangkut apa yang diyakini bersama. Iklim menyangkut bagaimana perilaku di sekolah dirasakan bersama. Sumber: (Hoy &amp; Miskel, 2008)
+Baterai dan senter: Budaya ibarat baterai sebagai sumber daya, iklim ibarat cahaya senter yang tampak darinya. Sumber: (Basyit, 2020)</a:t>
             </a:r>
             <a:endParaRPr lang="en-US" dirty="0"/>
           </a:p>
@@ -2826,7 +2874,7 @@
         <p:spPr>
           <a:xfrm>
             <a:off x="457200" y="2514600"/>
-            <a:ext cx="1920240" cy="0"/>
+            <a:ext cx="2621280" cy="0"/>
           </a:xfrm>
           <a:prstGeom prst="line">
             <a:avLst/>
@@ -2849,7 +2897,7 @@
         <p:spPr>
           <a:xfrm>
             <a:off x="457200" y="2587752"/>
-            <a:ext cx="1920240" cy="411480"/>
+            <a:ext cx="2621280" cy="411480"/>
           </a:xfrm>
           <a:prstGeom prst="rect">
             <a:avLst/>
@@ -2888,7 +2936,7 @@
         <p:spPr>
           <a:xfrm>
             <a:off x="457200" y="3063240"/>
-            <a:ext cx="1920240" cy="365760"/>
+            <a:ext cx="2621280" cy="365760"/>
           </a:xfrm>
           <a:prstGeom prst="rect">
             <a:avLst/>
@@ -2927,7 +2975,7 @@
         <p:spPr>
           <a:xfrm>
             <a:off x="457200" y="3474720"/>
-            <a:ext cx="1874520" cy="548640"/>
+            <a:ext cx="2575560" cy="548640"/>
           </a:xfrm>
           <a:prstGeom prst="rect">
             <a:avLst/>
@@ -2966,7 +3014,7 @@
         <p:spPr>
           <a:xfrm>
             <a:off x="457200" y="4297680"/>
-            <a:ext cx="1920240" cy="182880"/>
+            <a:ext cx="2621280" cy="182880"/>
           </a:xfrm>
           <a:prstGeom prst="rect">
             <a:avLst/>
@@ -3004,8 +3052,8 @@
         </p:nvSpPr>
         <p:spPr>
           <a:xfrm>
-            <a:off x="2560320" y="2514600"/>
-            <a:ext cx="1920240" cy="0"/>
+            <a:off x="3261360" y="2514600"/>
+            <a:ext cx="2621280" cy="0"/>
           </a:xfrm>
           <a:prstGeom prst="line">
             <a:avLst/>
@@ -3027,8 +3075,8 @@
         </p:nvSpPr>
         <p:spPr>
           <a:xfrm>
-            <a:off x="2560320" y="2587752"/>
-            <a:ext cx="1920240" cy="411480"/>
+            <a:off x="3261360" y="2587752"/>
+            <a:ext cx="2621280" cy="411480"/>
           </a:xfrm>
           <a:prstGeom prst="rect">
             <a:avLst/>
@@ -3066,8 +3114,8 @@
         </p:nvSpPr>
         <p:spPr>
           <a:xfrm>
-            <a:off x="2560320" y="3063240"/>
-            <a:ext cx="1920240" cy="365760"/>
+            <a:off x="3261360" y="3063240"/>
+            <a:ext cx="2621280" cy="365760"/>
           </a:xfrm>
           <a:prstGeom prst="rect">
             <a:avLst/>
@@ -3105,8 +3153,8 @@
         </p:nvSpPr>
         <p:spPr>
           <a:xfrm>
-            <a:off x="2560320" y="3474720"/>
-            <a:ext cx="1874520" cy="548640"/>
+            <a:off x="3261360" y="3474720"/>
+            <a:ext cx="2575560" cy="548640"/>
           </a:xfrm>
           <a:prstGeom prst="rect">
             <a:avLst/>
@@ -3144,8 +3192,8 @@
         </p:nvSpPr>
         <p:spPr>
           <a:xfrm>
-            <a:off x="2560320" y="4297680"/>
-            <a:ext cx="1920240" cy="182880"/>
+            <a:off x="3261360" y="4297680"/>
+            <a:ext cx="2621280" cy="182880"/>
           </a:xfrm>
           <a:prstGeom prst="rect">
             <a:avLst/>
@@ -3183,8 +3231,8 @@
         </p:nvSpPr>
         <p:spPr>
           <a:xfrm>
-            <a:off x="4663440" y="2514600"/>
-            <a:ext cx="1920240" cy="0"/>
+            <a:off x="6065520" y="2514600"/>
+            <a:ext cx="2621280" cy="0"/>
           </a:xfrm>
           <a:prstGeom prst="line">
             <a:avLst/>
@@ -3206,8 +3254,8 @@
         </p:nvSpPr>
         <p:spPr>
           <a:xfrm>
-            <a:off x="4663440" y="2587752"/>
-            <a:ext cx="1920240" cy="411480"/>
+            <a:off x="6065520" y="2587752"/>
+            <a:ext cx="2621280" cy="411480"/>
           </a:xfrm>
           <a:prstGeom prst="rect">
             <a:avLst/>
@@ -3245,8 +3293,8 @@
         </p:nvSpPr>
         <p:spPr>
           <a:xfrm>
-            <a:off x="4663440" y="3063240"/>
-            <a:ext cx="1920240" cy="365760"/>
+            <a:off x="6065520" y="3063240"/>
+            <a:ext cx="2621280" cy="365760"/>
           </a:xfrm>
           <a:prstGeom prst="rect">
             <a:avLst/>
@@ -3284,8 +3332,8 @@
         </p:nvSpPr>
         <p:spPr>
           <a:xfrm>
-            <a:off x="4663440" y="3474720"/>
-            <a:ext cx="1874520" cy="548640"/>
+            <a:off x="6065520" y="3474720"/>
+            <a:ext cx="2575560" cy="548640"/>
           </a:xfrm>
           <a:prstGeom prst="rect">
             <a:avLst/>
@@ -3323,8 +3371,8 @@
         </p:nvSpPr>
         <p:spPr>
           <a:xfrm>
-            <a:off x="4663440" y="4297680"/>
-            <a:ext cx="1920240" cy="182880"/>
+            <a:off x="6065520" y="4297680"/>
+            <a:ext cx="2621280" cy="182880"/>
           </a:xfrm>
           <a:prstGeom prst="rect">
             <a:avLst/>
@@ -3354,188 +3402,9 @@
           </a:p>
         </p:txBody>
       </p:sp>
-      <p:sp>
-        <p:nvSpPr>
-          <p:cNvPr id="19" name="Shape 17"/>
-          <p:cNvSpPr/>
-          <p:nvPr/>
-        </p:nvSpPr>
-        <p:spPr>
-          <a:xfrm>
-            <a:off x="6766560" y="2514600"/>
-            <a:ext cx="1920240" cy="0"/>
-          </a:xfrm>
-          <a:prstGeom prst="line">
-            <a:avLst/>
-          </a:prstGeom>
-          <a:noFill/>
-          <a:ln w="31750">
-            <a:solidFill>
-              <a:srgbClr val="0B0B0B"/>
-            </a:solidFill>
-            <a:prstDash val="solid"/>
-          </a:ln>
-        </p:spPr>
-      </p:sp>
-      <p:sp>
-        <p:nvSpPr>
-          <p:cNvPr id="20" name="Text 18"/>
-          <p:cNvSpPr txBox="1"/>
-          <p:nvPr/>
-        </p:nvSpPr>
-        <p:spPr>
-          <a:xfrm>
-            <a:off x="6766560" y="2587752"/>
-            <a:ext cx="1920240" cy="411480"/>
-          </a:xfrm>
-          <a:prstGeom prst="rect">
-            <a:avLst/>
-          </a:prstGeom>
-          <a:noFill/>
-          <a:ln/>
-        </p:spPr>
-        <p:txBody>
-          <a:bodyPr wrap="square" lIns="0" tIns="0" rIns="0" bIns="0" rtlCol="0" anchor="t"/>
-          <a:lstStyle/>
-          <a:p>
-            <a:pPr indent="0" marL="0">
-              <a:buNone/>
-            </a:pPr>
-            <a:r>
-              <a:rPr lang="en-US" sz="3000" dirty="0">
-                <a:solidFill>
-                  <a:srgbClr val="FF2A1A"/>
-                </a:solidFill>
-                <a:latin typeface="Impact" pitchFamily="34" charset="0"/>
-                <a:ea typeface="Impact" pitchFamily="34" charset="-122"/>
-                <a:cs typeface="Impact" pitchFamily="34" charset="-120"/>
-              </a:rPr>
-              <a:t>04</a:t>
-            </a:r>
-            <a:endParaRPr lang="en-US" sz="3000" dirty="0"/>
-          </a:p>
-        </p:txBody>
-      </p:sp>
-      <p:sp>
-        <p:nvSpPr>
-          <p:cNvPr id="21" name="Text 19"/>
-          <p:cNvSpPr txBox="1"/>
-          <p:nvPr/>
-        </p:nvSpPr>
-        <p:spPr>
-          <a:xfrm>
-            <a:off x="6766560" y="3063240"/>
-            <a:ext cx="1920240" cy="365760"/>
-          </a:xfrm>
-          <a:prstGeom prst="rect">
-            <a:avLst/>
-          </a:prstGeom>
-          <a:noFill/>
-          <a:ln/>
-        </p:spPr>
-        <p:txBody>
-          <a:bodyPr wrap="square" lIns="0" tIns="0" rIns="0" bIns="0" rtlCol="0" anchor="t"/>
-          <a:lstStyle/>
-          <a:p>
-            <a:pPr indent="0" marL="0">
-              <a:buNone/>
-            </a:pPr>
-            <a:r>
-              <a:rPr lang="en-US" sz="1600" dirty="0">
-                <a:solidFill>
-                  <a:srgbClr val="0B0B0B"/>
-                </a:solidFill>
-                <a:latin typeface="Impact" pitchFamily="34" charset="0"/>
-                <a:ea typeface="Impact" pitchFamily="34" charset="-122"/>
-                <a:cs typeface="Impact" pitchFamily="34" charset="-120"/>
-              </a:rPr>
-              <a:t>DIMENSI LOKAL</a:t>
-            </a:r>
-            <a:endParaRPr lang="en-US" sz="1600" dirty="0"/>
-          </a:p>
-        </p:txBody>
-      </p:sp>
-      <p:sp>
-        <p:nvSpPr>
-          <p:cNvPr id="22" name="Text 20"/>
-          <p:cNvSpPr txBox="1"/>
-          <p:nvPr/>
-        </p:nvSpPr>
-        <p:spPr>
-          <a:xfrm>
-            <a:off x="6766560" y="3474720"/>
-            <a:ext cx="1874520" cy="548640"/>
-          </a:xfrm>
-          <a:prstGeom prst="rect">
-            <a:avLst/>
-          </a:prstGeom>
-          <a:noFill/>
-          <a:ln/>
-        </p:spPr>
-        <p:txBody>
-          <a:bodyPr wrap="square" lIns="0" tIns="0" rIns="0" bIns="0" rtlCol="0" anchor="t"/>
-          <a:lstStyle/>
-          <a:p>
-            <a:pPr indent="0" marL="0">
-              <a:buNone/>
-            </a:pPr>
-            <a:r>
-              <a:rPr lang="en-US" sz="1250" b="1" dirty="0">
-                <a:solidFill>
-                  <a:srgbClr val="0B0B0B"/>
-                </a:solidFill>
-                <a:latin typeface="Arial Narrow" pitchFamily="34" charset="0"/>
-                <a:ea typeface="Arial Narrow" pitchFamily="34" charset="-122"/>
-                <a:cs typeface="Arial Narrow" pitchFamily="34" charset="-120"/>
-              </a:rPr>
-              <a:t>Komunikasi, kehangatan, dukungan, struktur</a:t>
-            </a:r>
-            <a:endParaRPr lang="en-US" sz="1250" dirty="0"/>
-          </a:p>
-        </p:txBody>
-      </p:sp>
-      <p:sp>
-        <p:nvSpPr>
-          <p:cNvPr id="23" name="Text 21"/>
-          <p:cNvSpPr txBox="1"/>
-          <p:nvPr/>
-        </p:nvSpPr>
-        <p:spPr>
-          <a:xfrm>
-            <a:off x="6766560" y="4297680"/>
-            <a:ext cx="1920240" cy="182880"/>
-          </a:xfrm>
-          <a:prstGeom prst="rect">
-            <a:avLst/>
-          </a:prstGeom>
-          <a:noFill/>
-          <a:ln/>
-        </p:spPr>
-        <p:txBody>
-          <a:bodyPr wrap="square" lIns="0" tIns="0" rIns="0" bIns="0" rtlCol="0" anchor="t"/>
-          <a:lstStyle/>
-          <a:p>
-            <a:pPr indent="0" marL="0">
-              <a:buNone/>
-            </a:pPr>
-            <a:r>
-              <a:rPr lang="en-US" sz="850" dirty="0">
-                <a:solidFill>
-                  <a:srgbClr val="C01E12"/>
-                </a:solidFill>
-                <a:latin typeface="Arial Narrow" pitchFamily="34" charset="0"/>
-                <a:ea typeface="Arial Narrow" pitchFamily="34" charset="-122"/>
-                <a:cs typeface="Arial Narrow" pitchFamily="34" charset="-120"/>
-              </a:rPr>
-              <a:t>(Setiyani dkk., 2024)</a:t>
-            </a:r>
-            <a:endParaRPr lang="en-US" sz="850" dirty="0"/>
-          </a:p>
-        </p:txBody>
-      </p:sp>
       <p:pic>
         <p:nvPicPr>
-          <p:cNvPr id="24" name="Image 0" descr="/mnt/user-data/outputs/logo.png">    </p:cNvPr>
+          <p:cNvPr id="19" name="Image 0" descr="/mnt/user-data/outputs/logo.png">    </p:cNvPr>
           <p:cNvPicPr>
             <a:picLocks noChangeAspect="1"/>
           </p:cNvPicPr>
@@ -6488,7 +6357,7 @@
         <p:spPr>
           <a:xfrm>
             <a:off x="457200" y="2514600"/>
-            <a:ext cx="1920240" cy="0"/>
+            <a:ext cx="2621280" cy="0"/>
           </a:xfrm>
           <a:prstGeom prst="line">
             <a:avLst/>
@@ -6511,7 +6380,7 @@
         <p:spPr>
           <a:xfrm>
             <a:off x="457200" y="2587752"/>
-            <a:ext cx="1920240" cy="411480"/>
+            <a:ext cx="2621280" cy="411480"/>
           </a:xfrm>
           <a:prstGeom prst="rect">
             <a:avLst/>
@@ -6550,7 +6419,7 @@
         <p:spPr>
           <a:xfrm>
             <a:off x="457200" y="3063240"/>
-            <a:ext cx="1920240" cy="365760"/>
+            <a:ext cx="2621280" cy="365760"/>
           </a:xfrm>
           <a:prstGeom prst="rect">
             <a:avLst/>
@@ -6589,7 +6458,7 @@
         <p:spPr>
           <a:xfrm>
             <a:off x="457200" y="3474720"/>
-            <a:ext cx="1874520" cy="548640"/>
+            <a:ext cx="2575560" cy="548640"/>
           </a:xfrm>
           <a:prstGeom prst="rect">
             <a:avLst/>
@@ -6628,7 +6497,7 @@
         <p:spPr>
           <a:xfrm>
             <a:off x="457200" y="4297680"/>
-            <a:ext cx="1920240" cy="182880"/>
+            <a:ext cx="2621280" cy="182880"/>
           </a:xfrm>
           <a:prstGeom prst="rect">
             <a:avLst/>
@@ -6666,8 +6535,8 @@
         </p:nvSpPr>
         <p:spPr>
           <a:xfrm>
-            <a:off x="2560320" y="2514600"/>
-            <a:ext cx="1920240" cy="0"/>
+            <a:off x="3261360" y="2514600"/>
+            <a:ext cx="2621280" cy="0"/>
           </a:xfrm>
           <a:prstGeom prst="line">
             <a:avLst/>
@@ -6689,8 +6558,8 @@
         </p:nvSpPr>
         <p:spPr>
           <a:xfrm>
-            <a:off x="2560320" y="2587752"/>
-            <a:ext cx="1920240" cy="411480"/>
+            <a:off x="3261360" y="2587752"/>
+            <a:ext cx="2621280" cy="411480"/>
           </a:xfrm>
           <a:prstGeom prst="rect">
             <a:avLst/>
@@ -6728,8 +6597,8 @@
         </p:nvSpPr>
         <p:spPr>
           <a:xfrm>
-            <a:off x="2560320" y="3063240"/>
-            <a:ext cx="1920240" cy="365760"/>
+            <a:off x="3261360" y="3063240"/>
+            <a:ext cx="2621280" cy="365760"/>
           </a:xfrm>
           <a:prstGeom prst="rect">
             <a:avLst/>
@@ -6767,8 +6636,8 @@
         </p:nvSpPr>
         <p:spPr>
           <a:xfrm>
-            <a:off x="2560320" y="3703320"/>
-            <a:ext cx="1874520" cy="548640"/>
+            <a:off x="3261360" y="3703320"/>
+            <a:ext cx="2575560" cy="548640"/>
           </a:xfrm>
           <a:prstGeom prst="rect">
             <a:avLst/>
@@ -6806,8 +6675,8 @@
         </p:nvSpPr>
         <p:spPr>
           <a:xfrm>
-            <a:off x="2560320" y="4297680"/>
-            <a:ext cx="1920240" cy="182880"/>
+            <a:off x="3261360" y="4297680"/>
+            <a:ext cx="2621280" cy="182880"/>
           </a:xfrm>
           <a:prstGeom prst="rect">
             <a:avLst/>
@@ -6845,8 +6714,8 @@
         </p:nvSpPr>
         <p:spPr>
           <a:xfrm>
-            <a:off x="4663440" y="2514600"/>
-            <a:ext cx="1920240" cy="0"/>
+            <a:off x="6065520" y="2514600"/>
+            <a:ext cx="2621280" cy="0"/>
           </a:xfrm>
           <a:prstGeom prst="line">
             <a:avLst/>
@@ -6868,8 +6737,8 @@
         </p:nvSpPr>
         <p:spPr>
           <a:xfrm>
-            <a:off x="4663440" y="2587752"/>
-            <a:ext cx="1920240" cy="411480"/>
+            <a:off x="6065520" y="2587752"/>
+            <a:ext cx="2621280" cy="411480"/>
           </a:xfrm>
           <a:prstGeom prst="rect">
             <a:avLst/>
@@ -6907,8 +6776,8 @@
         </p:nvSpPr>
         <p:spPr>
           <a:xfrm>
-            <a:off x="4663440" y="3063240"/>
-            <a:ext cx="1920240" cy="365760"/>
+            <a:off x="6065520" y="3063240"/>
+            <a:ext cx="2621280" cy="365760"/>
           </a:xfrm>
           <a:prstGeom prst="rect">
             <a:avLst/>
@@ -6946,8 +6815,8 @@
         </p:nvSpPr>
         <p:spPr>
           <a:xfrm>
-            <a:off x="4663440" y="3474720"/>
-            <a:ext cx="1874520" cy="548640"/>
+            <a:off x="6065520" y="3474720"/>
+            <a:ext cx="2575560" cy="548640"/>
           </a:xfrm>
           <a:prstGeom prst="rect">
             <a:avLst/>
@@ -6985,8 +6854,8 @@
         </p:nvSpPr>
         <p:spPr>
           <a:xfrm>
-            <a:off x="4663440" y="4297680"/>
-            <a:ext cx="1920240" cy="182880"/>
+            <a:off x="6065520" y="4297680"/>
+            <a:ext cx="2621280" cy="182880"/>
           </a:xfrm>
           <a:prstGeom prst="rect">
             <a:avLst/>
@@ -7016,188 +6885,9 @@
           </a:p>
         </p:txBody>
       </p:sp>
-      <p:sp>
-        <p:nvSpPr>
-          <p:cNvPr id="19" name="Shape 17"/>
-          <p:cNvSpPr/>
-          <p:nvPr/>
-        </p:nvSpPr>
-        <p:spPr>
-          <a:xfrm>
-            <a:off x="6766560" y="2514600"/>
-            <a:ext cx="1920240" cy="0"/>
-          </a:xfrm>
-          <a:prstGeom prst="line">
-            <a:avLst/>
-          </a:prstGeom>
-          <a:noFill/>
-          <a:ln w="31750">
-            <a:solidFill>
-              <a:srgbClr val="0B0B0B"/>
-            </a:solidFill>
-            <a:prstDash val="solid"/>
-          </a:ln>
-        </p:spPr>
-      </p:sp>
-      <p:sp>
-        <p:nvSpPr>
-          <p:cNvPr id="20" name="Text 18"/>
-          <p:cNvSpPr txBox="1"/>
-          <p:nvPr/>
-        </p:nvSpPr>
-        <p:spPr>
-          <a:xfrm>
-            <a:off x="6766560" y="2587752"/>
-            <a:ext cx="1920240" cy="411480"/>
-          </a:xfrm>
-          <a:prstGeom prst="rect">
-            <a:avLst/>
-          </a:prstGeom>
-          <a:noFill/>
-          <a:ln/>
-        </p:spPr>
-        <p:txBody>
-          <a:bodyPr wrap="square" lIns="0" tIns="0" rIns="0" bIns="0" rtlCol="0" anchor="t"/>
-          <a:lstStyle/>
-          <a:p>
-            <a:pPr indent="0" marL="0">
-              <a:buNone/>
-            </a:pPr>
-            <a:r>
-              <a:rPr lang="en-US" sz="3000" dirty="0">
-                <a:solidFill>
-                  <a:srgbClr val="FF2A1A"/>
-                </a:solidFill>
-                <a:latin typeface="Impact" pitchFamily="34" charset="0"/>
-                <a:ea typeface="Impact" pitchFamily="34" charset="-122"/>
-                <a:cs typeface="Impact" pitchFamily="34" charset="-120"/>
-              </a:rPr>
-              <a:t>04</a:t>
-            </a:r>
-            <a:endParaRPr lang="en-US" sz="3000" dirty="0"/>
-          </a:p>
-        </p:txBody>
-      </p:sp>
-      <p:sp>
-        <p:nvSpPr>
-          <p:cNvPr id="21" name="Text 19"/>
-          <p:cNvSpPr txBox="1"/>
-          <p:nvPr/>
-        </p:nvSpPr>
-        <p:spPr>
-          <a:xfrm>
-            <a:off x="6766560" y="3063240"/>
-            <a:ext cx="1920240" cy="365760"/>
-          </a:xfrm>
-          <a:prstGeom prst="rect">
-            <a:avLst/>
-          </a:prstGeom>
-          <a:noFill/>
-          <a:ln/>
-        </p:spPr>
-        <p:txBody>
-          <a:bodyPr wrap="square" lIns="0" tIns="0" rIns="0" bIns="0" rtlCol="0" anchor="t"/>
-          <a:lstStyle/>
-          <a:p>
-            <a:pPr indent="0" marL="0">
-              <a:buNone/>
-            </a:pPr>
-            <a:r>
-              <a:rPr lang="en-US" sz="1600" dirty="0">
-                <a:solidFill>
-                  <a:srgbClr val="0B0B0B"/>
-                </a:solidFill>
-                <a:latin typeface="Impact" pitchFamily="34" charset="0"/>
-                <a:ea typeface="Impact" pitchFamily="34" charset="-122"/>
-                <a:cs typeface="Impact" pitchFamily="34" charset="-120"/>
-              </a:rPr>
-              <a:t>PERAN PEMIMPIN</a:t>
-            </a:r>
-            <a:endParaRPr lang="en-US" sz="1600" dirty="0"/>
-          </a:p>
-        </p:txBody>
-      </p:sp>
-      <p:sp>
-        <p:nvSpPr>
-          <p:cNvPr id="22" name="Text 20"/>
-          <p:cNvSpPr txBox="1"/>
-          <p:nvPr/>
-        </p:nvSpPr>
-        <p:spPr>
-          <a:xfrm>
-            <a:off x="6766560" y="3474720"/>
-            <a:ext cx="1874520" cy="548640"/>
-          </a:xfrm>
-          <a:prstGeom prst="rect">
-            <a:avLst/>
-          </a:prstGeom>
-          <a:noFill/>
-          <a:ln/>
-        </p:spPr>
-        <p:txBody>
-          <a:bodyPr wrap="square" lIns="0" tIns="0" rIns="0" bIns="0" rtlCol="0" anchor="t"/>
-          <a:lstStyle/>
-          <a:p>
-            <a:pPr indent="0" marL="0">
-              <a:buNone/>
-            </a:pPr>
-            <a:r>
-              <a:rPr lang="en-US" sz="1250" b="1" dirty="0">
-                <a:solidFill>
-                  <a:srgbClr val="0B0B0B"/>
-                </a:solidFill>
-                <a:latin typeface="Arial Narrow" pitchFamily="34" charset="0"/>
-                <a:ea typeface="Arial Narrow" pitchFamily="34" charset="-122"/>
-                <a:cs typeface="Arial Narrow" pitchFamily="34" charset="-120"/>
-              </a:rPr>
-              <a:t>Komunikasi partisipatif dan pelatihan</a:t>
-            </a:r>
-            <a:endParaRPr lang="en-US" sz="1250" dirty="0"/>
-          </a:p>
-        </p:txBody>
-      </p:sp>
-      <p:sp>
-        <p:nvSpPr>
-          <p:cNvPr id="23" name="Text 21"/>
-          <p:cNvSpPr txBox="1"/>
-          <p:nvPr/>
-        </p:nvSpPr>
-        <p:spPr>
-          <a:xfrm>
-            <a:off x="6766560" y="4297680"/>
-            <a:ext cx="1920240" cy="182880"/>
-          </a:xfrm>
-          <a:prstGeom prst="rect">
-            <a:avLst/>
-          </a:prstGeom>
-          <a:noFill/>
-          <a:ln/>
-        </p:spPr>
-        <p:txBody>
-          <a:bodyPr wrap="square" lIns="0" tIns="0" rIns="0" bIns="0" rtlCol="0" anchor="t"/>
-          <a:lstStyle/>
-          <a:p>
-            <a:pPr indent="0" marL="0">
-              <a:buNone/>
-            </a:pPr>
-            <a:r>
-              <a:rPr lang="en-US" sz="850" dirty="0">
-                <a:solidFill>
-                  <a:srgbClr val="C01E12"/>
-                </a:solidFill>
-                <a:latin typeface="Arial Narrow" pitchFamily="34" charset="0"/>
-                <a:ea typeface="Arial Narrow" pitchFamily="34" charset="-122"/>
-                <a:cs typeface="Arial Narrow" pitchFamily="34" charset="-120"/>
-              </a:rPr>
-              <a:t>(Tiftazani dkk., 2025)</a:t>
-            </a:r>
-            <a:endParaRPr lang="en-US" sz="850" dirty="0"/>
-          </a:p>
-        </p:txBody>
-      </p:sp>
       <p:pic>
         <p:nvPicPr>
-          <p:cNvPr id="24" name="Image 0" descr="/mnt/user-data/outputs/logo.png">    </p:cNvPr>
+          <p:cNvPr id="19" name="Image 0" descr="/mnt/user-data/outputs/logo.png">    </p:cNvPr>
           <p:cNvPicPr>
             <a:picLocks noChangeAspect="1"/>
           </p:cNvPicPr>
@@ -14277,7 +13967,7 @@
         <p:spPr>
           <a:xfrm>
             <a:off x="457200" y="2514600"/>
-            <a:ext cx="1920240" cy="0"/>
+            <a:ext cx="2621280" cy="0"/>
           </a:xfrm>
           <a:prstGeom prst="line">
             <a:avLst/>
@@ -14300,7 +13990,7 @@
         <p:spPr>
           <a:xfrm>
             <a:off x="457200" y="2587752"/>
-            <a:ext cx="1920240" cy="411480"/>
+            <a:ext cx="2621280" cy="411480"/>
           </a:xfrm>
           <a:prstGeom prst="rect">
             <a:avLst/>
@@ -14339,7 +14029,7 @@
         <p:spPr>
           <a:xfrm>
             <a:off x="457200" y="3063240"/>
-            <a:ext cx="1920240" cy="365760"/>
+            <a:ext cx="2621280" cy="365760"/>
           </a:xfrm>
           <a:prstGeom prst="rect">
             <a:avLst/>
@@ -14378,7 +14068,7 @@
         <p:spPr>
           <a:xfrm>
             <a:off x="457200" y="3474720"/>
-            <a:ext cx="1874520" cy="548640"/>
+            <a:ext cx="2575560" cy="548640"/>
           </a:xfrm>
           <a:prstGeom prst="rect">
             <a:avLst/>
@@ -14417,7 +14107,7 @@
         <p:spPr>
           <a:xfrm>
             <a:off x="457200" y="4297680"/>
-            <a:ext cx="1920240" cy="182880"/>
+            <a:ext cx="2621280" cy="182880"/>
           </a:xfrm>
           <a:prstGeom prst="rect">
             <a:avLst/>
@@ -14455,8 +14145,8 @@
         </p:nvSpPr>
         <p:spPr>
           <a:xfrm>
-            <a:off x="2560320" y="2514600"/>
-            <a:ext cx="1920240" cy="0"/>
+            <a:off x="3261360" y="2514600"/>
+            <a:ext cx="2621280" cy="0"/>
           </a:xfrm>
           <a:prstGeom prst="line">
             <a:avLst/>
@@ -14478,8 +14168,8 @@
         </p:nvSpPr>
         <p:spPr>
           <a:xfrm>
-            <a:off x="2560320" y="2587752"/>
-            <a:ext cx="1920240" cy="411480"/>
+            <a:off x="3261360" y="2587752"/>
+            <a:ext cx="2621280" cy="411480"/>
           </a:xfrm>
           <a:prstGeom prst="rect">
             <a:avLst/>
@@ -14517,8 +14207,8 @@
         </p:nvSpPr>
         <p:spPr>
           <a:xfrm>
-            <a:off x="2560320" y="3063240"/>
-            <a:ext cx="1920240" cy="365760"/>
+            <a:off x="3261360" y="3063240"/>
+            <a:ext cx="2621280" cy="365760"/>
           </a:xfrm>
           <a:prstGeom prst="rect">
             <a:avLst/>
@@ -14556,8 +14246,8 @@
         </p:nvSpPr>
         <p:spPr>
           <a:xfrm>
-            <a:off x="2560320" y="3474720"/>
-            <a:ext cx="1874520" cy="548640"/>
+            <a:off x="3261360" y="3474720"/>
+            <a:ext cx="2575560" cy="548640"/>
           </a:xfrm>
           <a:prstGeom prst="rect">
             <a:avLst/>
@@ -14595,8 +14285,8 @@
         </p:nvSpPr>
         <p:spPr>
           <a:xfrm>
-            <a:off x="2560320" y="4297680"/>
-            <a:ext cx="1920240" cy="182880"/>
+            <a:off x="3261360" y="4297680"/>
+            <a:ext cx="2621280" cy="182880"/>
           </a:xfrm>
           <a:prstGeom prst="rect">
             <a:avLst/>
@@ -14634,8 +14324,8 @@
         </p:nvSpPr>
         <p:spPr>
           <a:xfrm>
-            <a:off x="4663440" y="2514600"/>
-            <a:ext cx="1920240" cy="0"/>
+            <a:off x="6065520" y="2514600"/>
+            <a:ext cx="2621280" cy="0"/>
           </a:xfrm>
           <a:prstGeom prst="line">
             <a:avLst/>
@@ -14657,8 +14347,8 @@
         </p:nvSpPr>
         <p:spPr>
           <a:xfrm>
-            <a:off x="4663440" y="2587752"/>
-            <a:ext cx="1920240" cy="411480"/>
+            <a:off x="6065520" y="2587752"/>
+            <a:ext cx="2621280" cy="411480"/>
           </a:xfrm>
           <a:prstGeom prst="rect">
             <a:avLst/>
@@ -14696,8 +14386,8 @@
         </p:nvSpPr>
         <p:spPr>
           <a:xfrm>
-            <a:off x="4663440" y="3063240"/>
-            <a:ext cx="1920240" cy="365760"/>
+            <a:off x="6065520" y="3063240"/>
+            <a:ext cx="2621280" cy="365760"/>
           </a:xfrm>
           <a:prstGeom prst="rect">
             <a:avLst/>
@@ -14735,8 +14425,8 @@
         </p:nvSpPr>
         <p:spPr>
           <a:xfrm>
-            <a:off x="4663440" y="3474720"/>
-            <a:ext cx="1874520" cy="548640"/>
+            <a:off x="6065520" y="3474720"/>
+            <a:ext cx="2575560" cy="548640"/>
           </a:xfrm>
           <a:prstGeom prst="rect">
             <a:avLst/>
@@ -14774,8 +14464,8 @@
         </p:nvSpPr>
         <p:spPr>
           <a:xfrm>
-            <a:off x="4663440" y="4297680"/>
-            <a:ext cx="1920240" cy="182880"/>
+            <a:off x="6065520" y="4297680"/>
+            <a:ext cx="2621280" cy="182880"/>
           </a:xfrm>
           <a:prstGeom prst="rect">
             <a:avLst/>
@@ -14805,188 +14495,9 @@
           </a:p>
         </p:txBody>
       </p:sp>
-      <p:sp>
-        <p:nvSpPr>
-          <p:cNvPr id="19" name="Shape 17"/>
-          <p:cNvSpPr/>
-          <p:nvPr/>
-        </p:nvSpPr>
-        <p:spPr>
-          <a:xfrm>
-            <a:off x="6766560" y="2514600"/>
-            <a:ext cx="1920240" cy="0"/>
-          </a:xfrm>
-          <a:prstGeom prst="line">
-            <a:avLst/>
-          </a:prstGeom>
-          <a:noFill/>
-          <a:ln w="31750">
-            <a:solidFill>
-              <a:srgbClr val="0B0B0B"/>
-            </a:solidFill>
-            <a:prstDash val="solid"/>
-          </a:ln>
-        </p:spPr>
-      </p:sp>
-      <p:sp>
-        <p:nvSpPr>
-          <p:cNvPr id="20" name="Text 18"/>
-          <p:cNvSpPr txBox="1"/>
-          <p:nvPr/>
-        </p:nvSpPr>
-        <p:spPr>
-          <a:xfrm>
-            <a:off x="6766560" y="2587752"/>
-            <a:ext cx="1920240" cy="411480"/>
-          </a:xfrm>
-          <a:prstGeom prst="rect">
-            <a:avLst/>
-          </a:prstGeom>
-          <a:noFill/>
-          <a:ln/>
-        </p:spPr>
-        <p:txBody>
-          <a:bodyPr wrap="square" lIns="0" tIns="0" rIns="0" bIns="0" rtlCol="0" anchor="t"/>
-          <a:lstStyle/>
-          <a:p>
-            <a:pPr indent="0" marL="0">
-              <a:buNone/>
-            </a:pPr>
-            <a:r>
-              <a:rPr lang="en-US" sz="3000" dirty="0">
-                <a:solidFill>
-                  <a:srgbClr val="FF2A1A"/>
-                </a:solidFill>
-                <a:latin typeface="Impact" pitchFamily="34" charset="0"/>
-                <a:ea typeface="Impact" pitchFamily="34" charset="-122"/>
-                <a:cs typeface="Impact" pitchFamily="34" charset="-120"/>
-              </a:rPr>
-              <a:t>04</a:t>
-            </a:r>
-            <a:endParaRPr lang="en-US" sz="3000" dirty="0"/>
-          </a:p>
-        </p:txBody>
-      </p:sp>
-      <p:sp>
-        <p:nvSpPr>
-          <p:cNvPr id="21" name="Text 19"/>
-          <p:cNvSpPr txBox="1"/>
-          <p:nvPr/>
-        </p:nvSpPr>
-        <p:spPr>
-          <a:xfrm>
-            <a:off x="6766560" y="3063240"/>
-            <a:ext cx="1920240" cy="365760"/>
-          </a:xfrm>
-          <a:prstGeom prst="rect">
-            <a:avLst/>
-          </a:prstGeom>
-          <a:noFill/>
-          <a:ln/>
-        </p:spPr>
-        <p:txBody>
-          <a:bodyPr wrap="square" lIns="0" tIns="0" rIns="0" bIns="0" rtlCol="0" anchor="t"/>
-          <a:lstStyle/>
-          <a:p>
-            <a:pPr indent="0" marL="0">
-              <a:buNone/>
-            </a:pPr>
-            <a:r>
-              <a:rPr lang="en-US" sz="1600" dirty="0">
-                <a:solidFill>
-                  <a:srgbClr val="0B0B0B"/>
-                </a:solidFill>
-                <a:latin typeface="Impact" pitchFamily="34" charset="0"/>
-                <a:ea typeface="Impact" pitchFamily="34" charset="-122"/>
-                <a:cs typeface="Impact" pitchFamily="34" charset="-120"/>
-              </a:rPr>
-              <a:t>DI MADRASAH</a:t>
-            </a:r>
-            <a:endParaRPr lang="en-US" sz="1600" dirty="0"/>
-          </a:p>
-        </p:txBody>
-      </p:sp>
-      <p:sp>
-        <p:nvSpPr>
-          <p:cNvPr id="22" name="Text 20"/>
-          <p:cNvSpPr txBox="1"/>
-          <p:nvPr/>
-        </p:nvSpPr>
-        <p:spPr>
-          <a:xfrm>
-            <a:off x="6766560" y="3474720"/>
-            <a:ext cx="1874520" cy="548640"/>
-          </a:xfrm>
-          <a:prstGeom prst="rect">
-            <a:avLst/>
-          </a:prstGeom>
-          <a:noFill/>
-          <a:ln/>
-        </p:spPr>
-        <p:txBody>
-          <a:bodyPr wrap="square" lIns="0" tIns="0" rIns="0" bIns="0" rtlCol="0" anchor="t"/>
-          <a:lstStyle/>
-          <a:p>
-            <a:pPr indent="0" marL="0">
-              <a:buNone/>
-            </a:pPr>
-            <a:r>
-              <a:rPr lang="en-US" sz="1250" b="1" dirty="0">
-                <a:solidFill>
-                  <a:srgbClr val="0B0B0B"/>
-                </a:solidFill>
-                <a:latin typeface="Arial Narrow" pitchFamily="34" charset="0"/>
-                <a:ea typeface="Arial Narrow" pitchFamily="34" charset="-122"/>
-                <a:cs typeface="Arial Narrow" pitchFamily="34" charset="-120"/>
-              </a:rPr>
-              <a:t>Bekerja adalah ibadah</a:t>
-            </a:r>
-            <a:endParaRPr lang="en-US" sz="1250" dirty="0"/>
-          </a:p>
-        </p:txBody>
-      </p:sp>
-      <p:sp>
-        <p:nvSpPr>
-          <p:cNvPr id="23" name="Text 21"/>
-          <p:cNvSpPr txBox="1"/>
-          <p:nvPr/>
-        </p:nvSpPr>
-        <p:spPr>
-          <a:xfrm>
-            <a:off x="6766560" y="4297680"/>
-            <a:ext cx="1920240" cy="182880"/>
-          </a:xfrm>
-          <a:prstGeom prst="rect">
-            <a:avLst/>
-          </a:prstGeom>
-          <a:noFill/>
-          <a:ln/>
-        </p:spPr>
-        <p:txBody>
-          <a:bodyPr wrap="square" lIns="0" tIns="0" rIns="0" bIns="0" rtlCol="0" anchor="t"/>
-          <a:lstStyle/>
-          <a:p>
-            <a:pPr indent="0" marL="0">
-              <a:buNone/>
-            </a:pPr>
-            <a:r>
-              <a:rPr lang="en-US" sz="850" dirty="0">
-                <a:solidFill>
-                  <a:srgbClr val="C01E12"/>
-                </a:solidFill>
-                <a:latin typeface="Arial Narrow" pitchFamily="34" charset="0"/>
-                <a:ea typeface="Arial Narrow" pitchFamily="34" charset="-122"/>
-                <a:cs typeface="Arial Narrow" pitchFamily="34" charset="-120"/>
-              </a:rPr>
-              <a:t>(Kusumaningrum dkk., 2020)</a:t>
-            </a:r>
-            <a:endParaRPr lang="en-US" sz="850" dirty="0"/>
-          </a:p>
-        </p:txBody>
-      </p:sp>
       <p:pic>
         <p:nvPicPr>
-          <p:cNvPr id="24" name="Image 0" descr="/mnt/user-data/outputs/logo.png">    </p:cNvPr>
+          <p:cNvPr id="19" name="Image 0" descr="/mnt/user-data/outputs/logo.png">    </p:cNvPr>
           <p:cNvPicPr>
             <a:picLocks noChangeAspect="1"/>
           </p:cNvPicPr>
